--- a/public/fun/pack/pptx/wedding/결혼식_45_감사·답례중심_한지등.pptx
+++ b/public/fun/pack/pptx/wedding/결혼식_45_감사·답례중심_한지등.pptx
@@ -3286,6 +3286,14 @@
 <file path=ppt/slides/slide1.xml><?xml version="1.0" encoding="utf-8"?>
 <p:sld xmlns:a="http://schemas.openxmlformats.org/drawingml/2006/main" xmlns:p="http://schemas.openxmlformats.org/presentationml/2006/main" xmlns:r="http://schemas.openxmlformats.org/officeDocument/2006/relationships">
   <p:cSld>
+    <p:bg>
+      <p:bgPr>
+        <a:solidFill>
+          <a:srgbClr val="F6EAD5"/>
+        </a:solidFill>
+        <a:effectLst/>
+      </p:bgPr>
+    </p:bg>
     <p:spTree>
       <p:nvGrpSpPr>
         <p:cNvPr id="1" name=""/>
@@ -3293,30 +3301,119 @@
         <p:nvPr/>
       </p:nvGrpSpPr>
       <p:grpSpPr/>
-      <p:pic>
-        <p:nvPicPr>
-          <p:cNvPr id="3" name="표지 그림" descr="wedding-45.jpg"/>
-          <p:cNvPicPr>
-            <a:picLocks noChangeAspect="1"/>
-          </p:cNvPicPr>
+      <p:sp>
+        <p:nvSpPr>
+          <p:cNvPr id="3" name="사진 자리"/>
+          <p:cNvSpPr/>
           <p:nvPr/>
-        </p:nvPicPr>
-        <p:blipFill>
-          <a:blip r:embed="rId2"/>
-          <a:stretch>
-            <a:fillRect/>
-          </a:stretch>
-        </p:blipFill>
-        <p:spPr>
-          <a:xfrm>
-            <a:off x="0" y="0"/>
-            <a:ext cx="12191695" cy="6858000"/>
+        </p:nvSpPr>
+        <p:spPr>
+          <a:xfrm>
+            <a:off x="7558851" y="685800"/>
+            <a:ext cx="3169840" cy="5486400"/>
+          </a:xfrm>
+          <a:prstGeom prst="round2SameRect">
+            <a:avLst>
+              <a:gd name="adj1" fmla="val 50000"/>
+              <a:gd name="adj2" fmla="val 0"/>
+            </a:avLst>
+          </a:prstGeom>
+          <a:solidFill>
+            <a:srgbClr val="EBD4AD"/>
+          </a:solidFill>
+          <a:ln>
+            <a:noFill/>
+          </a:ln>
+        </p:spPr>
+        <p:txBody>
+          <a:bodyPr rtlCol="0" anchor="ctr" wrap="square" lIns="54864" rIns="54864" tIns="27432" bIns="27432">
+            <a:noAutofit/>
+          </a:bodyPr>
+          <a:lstStyle/>
+          <a:p>
+            <a:pPr algn="ctr">
+              <a:lnSpc>
+                <a:spcPct val="100000"/>
+              </a:lnSpc>
+            </a:pPr>
+            <a:r>
+              <a:rPr sz="1400" b="0" i="0">
+                <a:solidFill>
+                  <a:srgbClr val="493D27"/>
+                </a:solidFill>
+              </a:rPr>
+              <a:t>사진을 넣어 주세요</a:t>
+            </a:r>
+          </a:p>
+        </p:txBody>
+      </p:sp>
+      <p:sp>
+        <p:nvSpPr>
+          <p:cNvPr id="4" name="장식"/>
+          <p:cNvSpPr/>
+          <p:nvPr/>
+        </p:nvSpPr>
+        <p:spPr>
+          <a:xfrm>
+            <a:off x="6827349" y="4251960"/>
+            <a:ext cx="1005840" cy="1005840"/>
+          </a:xfrm>
+          <a:prstGeom prst="ellipse">
+            <a:avLst/>
+          </a:prstGeom>
+          <a:solidFill>
+            <a:srgbClr val="EBD4AD"/>
+          </a:solidFill>
+          <a:ln>
+            <a:noFill/>
+          </a:ln>
+        </p:spPr>
+        <p:txBody>
+          <a:bodyPr rtlCol="0" anchor="ctr"/>
+          <a:lstStyle/>
+          <a:p>
+            <a:pPr algn="ctr"/>
+          </a:p>
+        </p:txBody>
+      </p:sp>
+      <p:sp>
+        <p:nvSpPr>
+          <p:cNvPr id="5" name="라벨"/>
+          <p:cNvSpPr txBox="1"/>
+          <p:nvPr/>
+        </p:nvSpPr>
+        <p:spPr>
+          <a:xfrm>
+            <a:off x="822960" y="2148840"/>
+            <a:ext cx="5608179" cy="274320"/>
           </a:xfrm>
           <a:prstGeom prst="rect">
             <a:avLst/>
           </a:prstGeom>
-        </p:spPr>
-      </p:pic>
+          <a:noFill/>
+        </p:spPr>
+        <p:txBody>
+          <a:bodyPr wrap="square" lIns="54864" rIns="54864" tIns="27432" bIns="27432" anchor="t">
+            <a:noAutofit/>
+          </a:bodyPr>
+          <a:lstStyle/>
+          <a:p>
+            <a:pPr algn="l">
+              <a:lnSpc>
+                <a:spcPct val="115000"/>
+              </a:lnSpc>
+            </a:pPr>
+            <a:r>
+              <a:rPr sz="1000" b="1" i="0" spc="250">
+                <a:solidFill>
+                  <a:srgbClr val="26231F"/>
+                </a:solidFill>
+              </a:rPr>
+              <a:t>WEDDING</a:t>
+            </a:r>
+          </a:p>
+        </p:txBody>
+      </p:sp>
       <p:sp>
         <p:nvSpPr>
           <p:cNvPr id="2" name="Title 1"/>
@@ -3329,8 +3426,8 @@
         </p:nvSpPr>
         <p:spPr>
           <a:xfrm>
-            <a:off x="853418" y="2057400"/>
-            <a:ext cx="6095847" cy="1554480"/>
+            <a:off x="822960" y="2606040"/>
+            <a:ext cx="5608179" cy="1188720"/>
           </a:xfrm>
         </p:spPr>
         <p:txBody>
@@ -3347,7 +3444,7 @@
             <a:r>
               <a:rPr sz="3600" b="1" i="0">
                 <a:solidFill>
-                  <a:srgbClr val="7C5D27"/>
+                  <a:srgbClr val="26231F"/>
                 </a:solidFill>
               </a:rPr>
               <a:t>저희 결혼합니다</a:t>
@@ -3357,14 +3454,14 @@
       </p:sp>
       <p:sp>
         <p:nvSpPr>
-          <p:cNvPr id="4" name="한 줄 문구"/>
+          <p:cNvPr id="6" name="한 줄 문구"/>
           <p:cNvSpPr txBox="1"/>
           <p:nvPr/>
         </p:nvSpPr>
         <p:spPr>
           <a:xfrm>
-            <a:off x="853418" y="3749039"/>
-            <a:ext cx="6095847" cy="822960"/>
+            <a:off x="822960" y="3886200"/>
+            <a:ext cx="5608179" cy="822960"/>
           </a:xfrm>
           <a:prstGeom prst="rect">
             <a:avLst/>
@@ -3383,9 +3480,9 @@
               </a:lnSpc>
             </a:pPr>
             <a:r>
-              <a:rPr sz="1700" b="0" i="1">
-                <a:solidFill>
-                  <a:srgbClr val="7C5D27"/>
+              <a:rPr sz="1700" b="0" i="0">
+                <a:solidFill>
+                  <a:srgbClr val="26231F"/>
                 </a:solidFill>
               </a:rPr>
               <a:t>추운 날 와 주셔서 더 고맙습니다</a:t>
@@ -3395,14 +3492,14 @@
       </p:sp>
       <p:sp>
         <p:nvSpPr>
-          <p:cNvPr id="5" name="안내 문구"/>
+          <p:cNvPr id="7" name="안내 문구"/>
           <p:cNvSpPr txBox="1"/>
           <p:nvPr/>
         </p:nvSpPr>
         <p:spPr>
           <a:xfrm>
-            <a:off x="853418" y="4617720"/>
-            <a:ext cx="6095847" cy="914400"/>
+            <a:off x="822960" y="4754880"/>
+            <a:ext cx="5608179" cy="914400"/>
           </a:xfrm>
           <a:prstGeom prst="rect">
             <a:avLst/>
@@ -3423,7 +3520,7 @@
             <a:r>
               <a:rPr sz="1400" b="0" i="0">
                 <a:solidFill>
-                  <a:srgbClr val="666666"/>
+                  <a:srgbClr val="26231F"/>
                 </a:solidFill>
               </a:rPr>
               <a:t>신랑 이름 ♥ 신부 이름</a:t>
@@ -3438,10 +3535,10 @@
             <a:r>
               <a:rPr sz="1400" b="0" i="0">
                 <a:solidFill>
-                  <a:srgbClr val="666666"/>
+                  <a:srgbClr val="26231F"/>
                 </a:solidFill>
               </a:rPr>
-              <a:t>2027. 00. 00 · 예식장 이름</a:t>
+              <a:t>날짜 입력 · 예식장 이름</a:t>
             </a:r>
           </a:p>
         </p:txBody>
@@ -3460,7 +3557,7 @@
     <p:bg>
       <p:bgPr>
         <a:solidFill>
-          <a:srgbClr val="FAF6EF"/>
+          <a:srgbClr val="FFFFFF"/>
         </a:solidFill>
         <a:effectLst/>
       </p:bgPr>
@@ -3480,14 +3577,14 @@
         </p:nvSpPr>
         <p:spPr>
           <a:xfrm>
-            <a:off x="0" y="0"/>
-            <a:ext cx="12191695" cy="274320"/>
+            <a:off x="0" y="6565392"/>
+            <a:ext cx="12191695" cy="292608"/>
           </a:xfrm>
           <a:prstGeom prst="rect">
             <a:avLst/>
           </a:prstGeom>
           <a:solidFill>
-            <a:srgbClr val="C49645"/>
+            <a:srgbClr val="EBD4AD"/>
           </a:solidFill>
           <a:ln>
             <a:noFill/>
@@ -3509,14 +3606,14 @@
         </p:nvSpPr>
         <p:spPr>
           <a:xfrm>
-            <a:off x="0" y="274320"/>
-            <a:ext cx="12191695" cy="54864"/>
-          </a:xfrm>
-          <a:prstGeom prst="rect">
+            <a:off x="10180015" y="-1645920"/>
+            <a:ext cx="3474720" cy="3474720"/>
+          </a:xfrm>
+          <a:prstGeom prst="ellipse">
             <a:avLst/>
           </a:prstGeom>
           <a:solidFill>
-            <a:srgbClr val="3B8591"/>
+            <a:srgbClr val="EBD4AD"/>
           </a:solidFill>
           <a:ln>
             <a:noFill/>
@@ -3532,6 +3629,73 @@
       </p:sp>
       <p:sp>
         <p:nvSpPr>
+          <p:cNvPr id="5" name="상단 라벨"/>
+          <p:cNvSpPr txBox="1"/>
+          <p:nvPr/>
+        </p:nvSpPr>
+        <p:spPr>
+          <a:xfrm>
+            <a:off x="640080" y="274320"/>
+            <a:ext cx="5486400" cy="274320"/>
+          </a:xfrm>
+          <a:prstGeom prst="rect">
+            <a:avLst/>
+          </a:prstGeom>
+          <a:noFill/>
+        </p:spPr>
+        <p:txBody>
+          <a:bodyPr wrap="square" lIns="54864" rIns="54864" tIns="27432" bIns="27432" anchor="ctr">
+            <a:noAutofit/>
+          </a:bodyPr>
+          <a:lstStyle/>
+          <a:p>
+            <a:pPr algn="l">
+              <a:lnSpc>
+                <a:spcPct val="115000"/>
+              </a:lnSpc>
+            </a:pPr>
+            <a:r>
+              <a:rPr sz="900" b="1" i="0" spc="250">
+                <a:solidFill>
+                  <a:srgbClr val="26231F"/>
+                </a:solidFill>
+              </a:rPr>
+              <a:t>WEDDING</a:t>
+            </a:r>
+          </a:p>
+        </p:txBody>
+      </p:sp>
+      <p:sp>
+        <p:nvSpPr>
+          <p:cNvPr id="6" name="포인트"/>
+          <p:cNvSpPr/>
+          <p:nvPr/>
+        </p:nvSpPr>
+        <p:spPr>
+          <a:xfrm>
+            <a:off x="11048695" y="502919"/>
+            <a:ext cx="274320" cy="274320"/>
+          </a:xfrm>
+          <a:prstGeom prst="mathPlus">
+            <a:avLst/>
+          </a:prstGeom>
+          <a:solidFill>
+            <a:srgbClr val="FFFFFF"/>
+          </a:solidFill>
+          <a:ln>
+            <a:noFill/>
+          </a:ln>
+        </p:spPr>
+        <p:txBody>
+          <a:bodyPr rtlCol="0" anchor="ctr"/>
+          <a:lstStyle/>
+          <a:p>
+            <a:pPr algn="ctr"/>
+          </a:p>
+        </p:txBody>
+      </p:sp>
+      <p:sp>
+        <p:nvSpPr>
           <p:cNvPr id="2" name="Title 1"/>
           <p:cNvSpPr>
             <a:spLocks noGrp="1"/>
@@ -3542,8 +3706,8 @@
         </p:nvSpPr>
         <p:spPr>
           <a:xfrm>
-            <a:off x="640080" y="457200"/>
-            <a:ext cx="9722815" cy="868680"/>
+            <a:off x="640080" y="658368"/>
+            <a:ext cx="9082735" cy="868680"/>
           </a:xfrm>
         </p:spPr>
         <p:txBody>
@@ -3560,7 +3724,7 @@
             <a:r>
               <a:rPr sz="3000" b="1" i="0">
                 <a:solidFill>
-                  <a:srgbClr val="7C5D27"/>
+                  <a:srgbClr val="26231F"/>
                 </a:solidFill>
               </a:rPr>
               <a:t>신랑 · 신부 소개</a:t>
@@ -3570,25 +3734,23 @@
       </p:sp>
       <p:sp>
         <p:nvSpPr>
-          <p:cNvPr id="5" name="사진 자리"/>
+          <p:cNvPr id="7" name="사진 자리"/>
           <p:cNvSpPr/>
           <p:nvPr/>
         </p:nvSpPr>
         <p:spPr>
           <a:xfrm>
-            <a:off x="1939213" y="1600200"/>
-            <a:ext cx="2400300" cy="2400300"/>
+            <a:off x="2042083" y="1783080"/>
+            <a:ext cx="2194560" cy="2194560"/>
           </a:xfrm>
           <a:prstGeom prst="ellipse">
             <a:avLst/>
           </a:prstGeom>
           <a:solidFill>
-            <a:srgbClr val="F2E5CF"/>
+            <a:srgbClr val="F6EAD5"/>
           </a:solidFill>
           <a:ln w="19050">
-            <a:solidFill>
-              <a:srgbClr val="C49645"/>
-            </a:solidFill>
+            <a:noFill/>
             <a:prstDash val="dash"/>
           </a:ln>
         </p:spPr>
@@ -3606,7 +3768,7 @@
             <a:r>
               <a:rPr sz="1200" b="0" i="0">
                 <a:solidFill>
-                  <a:srgbClr val="7C5D27"/>
+                  <a:srgbClr val="8E8780"/>
                 </a:solidFill>
               </a:rPr>
               <a:t>사진</a:t>
@@ -3616,13 +3778,13 @@
       </p:sp>
       <p:sp>
         <p:nvSpPr>
-          <p:cNvPr id="6" name="TextBox 5"/>
+          <p:cNvPr id="8" name="TextBox 7"/>
           <p:cNvSpPr txBox="1"/>
           <p:nvPr/>
         </p:nvSpPr>
         <p:spPr>
           <a:xfrm>
-            <a:off x="640080" y="4091939"/>
+            <a:off x="640080" y="4069079"/>
             <a:ext cx="4998567" cy="411480"/>
           </a:xfrm>
           <a:prstGeom prst="rect">
@@ -3644,7 +3806,7 @@
             <a:r>
               <a:rPr sz="1600" b="1" i="0">
                 <a:solidFill>
-                  <a:srgbClr val="7C5D27"/>
+                  <a:srgbClr val="493D27"/>
                 </a:solidFill>
               </a:rPr>
               <a:t>신랑</a:t>
@@ -3654,14 +3816,14 @@
       </p:sp>
       <p:sp>
         <p:nvSpPr>
-          <p:cNvPr id="7" name="TextBox 6"/>
+          <p:cNvPr id="9" name="TextBox 8"/>
           <p:cNvSpPr txBox="1"/>
           <p:nvPr/>
         </p:nvSpPr>
         <p:spPr>
           <a:xfrm>
-            <a:off x="731519" y="4549140"/>
-            <a:ext cx="4815687" cy="1851660"/>
+            <a:off x="731519" y="4526279"/>
+            <a:ext cx="4815687" cy="1645919"/>
           </a:xfrm>
           <a:prstGeom prst="rect">
             <a:avLst/>
@@ -3722,25 +3884,23 @@
       </p:sp>
       <p:sp>
         <p:nvSpPr>
-          <p:cNvPr id="8" name="사진 자리"/>
+          <p:cNvPr id="10" name="사진 자리"/>
           <p:cNvSpPr/>
           <p:nvPr/>
         </p:nvSpPr>
         <p:spPr>
           <a:xfrm>
-            <a:off x="7852181" y="1600200"/>
-            <a:ext cx="2400300" cy="2400300"/>
+            <a:off x="7955051" y="1783080"/>
+            <a:ext cx="2194560" cy="2194560"/>
           </a:xfrm>
           <a:prstGeom prst="ellipse">
             <a:avLst/>
           </a:prstGeom>
           <a:solidFill>
-            <a:srgbClr val="F2E5CF"/>
+            <a:srgbClr val="F6EAD5"/>
           </a:solidFill>
           <a:ln w="19050">
-            <a:solidFill>
-              <a:srgbClr val="C49645"/>
-            </a:solidFill>
+            <a:noFill/>
             <a:prstDash val="dash"/>
           </a:ln>
         </p:spPr>
@@ -3758,7 +3918,7 @@
             <a:r>
               <a:rPr sz="1200" b="0" i="0">
                 <a:solidFill>
-                  <a:srgbClr val="7C5D27"/>
+                  <a:srgbClr val="8E8780"/>
                 </a:solidFill>
               </a:rPr>
               <a:t>사진</a:t>
@@ -3768,13 +3928,13 @@
       </p:sp>
       <p:sp>
         <p:nvSpPr>
-          <p:cNvPr id="9" name="TextBox 8"/>
+          <p:cNvPr id="11" name="TextBox 10"/>
           <p:cNvSpPr txBox="1"/>
           <p:nvPr/>
         </p:nvSpPr>
         <p:spPr>
           <a:xfrm>
-            <a:off x="6553047" y="4091939"/>
+            <a:off x="6553047" y="4069079"/>
             <a:ext cx="4998567" cy="411480"/>
           </a:xfrm>
           <a:prstGeom prst="rect">
@@ -3796,7 +3956,7 @@
             <a:r>
               <a:rPr sz="1600" b="1" i="0">
                 <a:solidFill>
-                  <a:srgbClr val="7C5D27"/>
+                  <a:srgbClr val="493D27"/>
                 </a:solidFill>
               </a:rPr>
               <a:t>신부</a:t>
@@ -3806,14 +3966,14 @@
       </p:sp>
       <p:sp>
         <p:nvSpPr>
-          <p:cNvPr id="10" name="TextBox 9"/>
+          <p:cNvPr id="12" name="TextBox 11"/>
           <p:cNvSpPr txBox="1"/>
           <p:nvPr/>
         </p:nvSpPr>
         <p:spPr>
           <a:xfrm>
-            <a:off x="6644487" y="4549140"/>
-            <a:ext cx="4815687" cy="1851660"/>
+            <a:off x="6644487" y="4526279"/>
+            <a:ext cx="4815687" cy="1645919"/>
           </a:xfrm>
           <a:prstGeom prst="rect">
             <a:avLst/>
@@ -3886,7 +4046,7 @@
     <p:bg>
       <p:bgPr>
         <a:solidFill>
-          <a:srgbClr val="FAF6EF"/>
+          <a:srgbClr val="FFFFFF"/>
         </a:solidFill>
         <a:effectLst/>
       </p:bgPr>
@@ -3906,14 +4066,14 @@
         </p:nvSpPr>
         <p:spPr>
           <a:xfrm>
-            <a:off x="0" y="0"/>
-            <a:ext cx="12191695" cy="274320"/>
+            <a:off x="0" y="6565392"/>
+            <a:ext cx="12191695" cy="292608"/>
           </a:xfrm>
           <a:prstGeom prst="rect">
             <a:avLst/>
           </a:prstGeom>
           <a:solidFill>
-            <a:srgbClr val="C49645"/>
+            <a:srgbClr val="EBD4AD"/>
           </a:solidFill>
           <a:ln>
             <a:noFill/>
@@ -3935,14 +4095,14 @@
         </p:nvSpPr>
         <p:spPr>
           <a:xfrm>
-            <a:off x="0" y="274320"/>
-            <a:ext cx="12191695" cy="54864"/>
-          </a:xfrm>
-          <a:prstGeom prst="rect">
+            <a:off x="10180015" y="-1645920"/>
+            <a:ext cx="3474720" cy="3474720"/>
+          </a:xfrm>
+          <a:prstGeom prst="ellipse">
             <a:avLst/>
           </a:prstGeom>
           <a:solidFill>
-            <a:srgbClr val="3B8591"/>
+            <a:srgbClr val="EBD4AD"/>
           </a:solidFill>
           <a:ln>
             <a:noFill/>
@@ -3958,6 +4118,73 @@
       </p:sp>
       <p:sp>
         <p:nvSpPr>
+          <p:cNvPr id="5" name="상단 라벨"/>
+          <p:cNvSpPr txBox="1"/>
+          <p:nvPr/>
+        </p:nvSpPr>
+        <p:spPr>
+          <a:xfrm>
+            <a:off x="640080" y="274320"/>
+            <a:ext cx="5486400" cy="274320"/>
+          </a:xfrm>
+          <a:prstGeom prst="rect">
+            <a:avLst/>
+          </a:prstGeom>
+          <a:noFill/>
+        </p:spPr>
+        <p:txBody>
+          <a:bodyPr wrap="square" lIns="54864" rIns="54864" tIns="27432" bIns="27432" anchor="ctr">
+            <a:noAutofit/>
+          </a:bodyPr>
+          <a:lstStyle/>
+          <a:p>
+            <a:pPr algn="l">
+              <a:lnSpc>
+                <a:spcPct val="115000"/>
+              </a:lnSpc>
+            </a:pPr>
+            <a:r>
+              <a:rPr sz="900" b="1" i="0" spc="250">
+                <a:solidFill>
+                  <a:srgbClr val="26231F"/>
+                </a:solidFill>
+              </a:rPr>
+              <a:t>WEDDING</a:t>
+            </a:r>
+          </a:p>
+        </p:txBody>
+      </p:sp>
+      <p:sp>
+        <p:nvSpPr>
+          <p:cNvPr id="6" name="포인트"/>
+          <p:cNvSpPr/>
+          <p:nvPr/>
+        </p:nvSpPr>
+        <p:spPr>
+          <a:xfrm>
+            <a:off x="11048695" y="502919"/>
+            <a:ext cx="274320" cy="274320"/>
+          </a:xfrm>
+          <a:prstGeom prst="mathPlus">
+            <a:avLst/>
+          </a:prstGeom>
+          <a:solidFill>
+            <a:srgbClr val="FFFFFF"/>
+          </a:solidFill>
+          <a:ln>
+            <a:noFill/>
+          </a:ln>
+        </p:spPr>
+        <p:txBody>
+          <a:bodyPr rtlCol="0" anchor="ctr"/>
+          <a:lstStyle/>
+          <a:p>
+            <a:pPr algn="ctr"/>
+          </a:p>
+        </p:txBody>
+      </p:sp>
+      <p:sp>
+        <p:nvSpPr>
           <p:cNvPr id="2" name="Title 1"/>
           <p:cNvSpPr>
             <a:spLocks noGrp="1"/>
@@ -3968,8 +4195,8 @@
         </p:nvSpPr>
         <p:spPr>
           <a:xfrm>
-            <a:off x="640080" y="457200"/>
-            <a:ext cx="9722815" cy="868680"/>
+            <a:off x="640080" y="658368"/>
+            <a:ext cx="9082735" cy="868680"/>
           </a:xfrm>
         </p:spPr>
         <p:txBody>
@@ -3986,7 +4213,7 @@
             <a:r>
               <a:rPr sz="3000" b="1" i="0">
                 <a:solidFill>
-                  <a:srgbClr val="7C5D27"/>
+                  <a:srgbClr val="26231F"/>
                 </a:solidFill>
               </a:rPr>
               <a:t>감사의 말씀</a:t>
@@ -3996,26 +4223,26 @@
       </p:sp>
       <p:sp>
         <p:nvSpPr>
-          <p:cNvPr id="5" name="감사 글 칸"/>
+          <p:cNvPr id="7" name="감사 글 칸"/>
           <p:cNvSpPr/>
           <p:nvPr/>
         </p:nvSpPr>
         <p:spPr>
           <a:xfrm>
-            <a:off x="640080" y="1600200"/>
-            <a:ext cx="10911535" cy="4800600"/>
+            <a:off x="640080" y="1783080"/>
+            <a:ext cx="10911535" cy="4389120"/>
           </a:xfrm>
           <a:prstGeom prst="roundRect">
             <a:avLst>
-              <a:gd name="adj" fmla="val 8000"/>
+              <a:gd name="adj" fmla="val 3000"/>
             </a:avLst>
           </a:prstGeom>
           <a:solidFill>
-            <a:srgbClr val="FAF6EF"/>
+            <a:srgbClr val="FFFFFF"/>
           </a:solidFill>
-          <a:ln w="12700">
+          <a:ln w="9525">
             <a:solidFill>
-              <a:srgbClr val="F2E5CF"/>
+              <a:srgbClr val="F6EAD5"/>
             </a:solidFill>
           </a:ln>
         </p:spPr>
@@ -4029,14 +4256,43 @@
       </p:sp>
       <p:sp>
         <p:nvSpPr>
-          <p:cNvPr id="6" name="감사 글"/>
+          <p:cNvPr id="8" name="위쪽 띠"/>
+          <p:cNvSpPr/>
+          <p:nvPr/>
+        </p:nvSpPr>
+        <p:spPr>
+          <a:xfrm>
+            <a:off x="649224" y="1792224"/>
+            <a:ext cx="10893247" cy="82296"/>
+          </a:xfrm>
+          <a:prstGeom prst="rect">
+            <a:avLst/>
+          </a:prstGeom>
+          <a:solidFill>
+            <a:srgbClr val="E1C698"/>
+          </a:solidFill>
+          <a:ln>
+            <a:noFill/>
+          </a:ln>
+        </p:spPr>
+        <p:txBody>
+          <a:bodyPr rtlCol="0" anchor="ctr"/>
+          <a:lstStyle/>
+          <a:p>
+            <a:pPr algn="ctr"/>
+          </a:p>
+        </p:txBody>
+      </p:sp>
+      <p:sp>
+        <p:nvSpPr>
+          <p:cNvPr id="9" name="감사 글"/>
           <p:cNvSpPr txBox="1"/>
           <p:nvPr/>
         </p:nvSpPr>
         <p:spPr>
           <a:xfrm>
-            <a:off x="1097280" y="1965960"/>
-            <a:ext cx="9997135" cy="4069080"/>
+            <a:off x="1097280" y="2148840"/>
+            <a:ext cx="9997135" cy="3657600"/>
           </a:xfrm>
           <a:prstGeom prst="rect">
             <a:avLst/>
@@ -4057,7 +4313,7 @@
             <a:r>
               <a:rPr sz="2000" b="0" i="0">
                 <a:solidFill>
-                  <a:srgbClr val="2B2B2B"/>
+                  <a:srgbClr val="26231F"/>
                 </a:solidFill>
               </a:rPr>
               <a:t>바쁘신 중에 와 주셔서 고맙습니다.</a:t>
@@ -4072,7 +4328,7 @@
             <a:r>
               <a:rPr sz="2000" b="0" i="0">
                 <a:solidFill>
-                  <a:srgbClr val="2B2B2B"/>
+                  <a:srgbClr val="26231F"/>
                 </a:solidFill>
               </a:rPr>
               <a:t/>
@@ -4087,7 +4343,7 @@
             <a:r>
               <a:rPr sz="2000" b="0" i="0">
                 <a:solidFill>
-                  <a:srgbClr val="2B2B2B"/>
+                  <a:srgbClr val="26231F"/>
                 </a:solidFill>
               </a:rPr>
               <a:t>보내 주신 마음 잊지 않고</a:t>
@@ -4102,7 +4358,7 @@
             <a:r>
               <a:rPr sz="2000" b="0" i="0">
                 <a:solidFill>
-                  <a:srgbClr val="2B2B2B"/>
+                  <a:srgbClr val="26231F"/>
                 </a:solidFill>
               </a:rPr>
               <a:t>잘 살겠습니다.</a:t>
@@ -4117,7 +4373,7 @@
             <a:r>
               <a:rPr sz="2000" b="0" i="0">
                 <a:solidFill>
-                  <a:srgbClr val="2B2B2B"/>
+                  <a:srgbClr val="26231F"/>
                 </a:solidFill>
               </a:rPr>
               <a:t/>
@@ -4132,7 +4388,7 @@
             <a:r>
               <a:rPr sz="2000" b="0" i="0">
                 <a:solidFill>
-                  <a:srgbClr val="2B2B2B"/>
+                  <a:srgbClr val="26231F"/>
                 </a:solidFill>
               </a:rPr>
               <a:t>신랑 · 신부 드림</a:t>
@@ -4154,7 +4410,7 @@
     <p:bg>
       <p:bgPr>
         <a:solidFill>
-          <a:srgbClr val="FAF6EF"/>
+          <a:srgbClr val="FFFFFF"/>
         </a:solidFill>
         <a:effectLst/>
       </p:bgPr>
@@ -4174,14 +4430,14 @@
         </p:nvSpPr>
         <p:spPr>
           <a:xfrm>
-            <a:off x="0" y="0"/>
-            <a:ext cx="12191695" cy="274320"/>
+            <a:off x="0" y="6565392"/>
+            <a:ext cx="12191695" cy="292608"/>
           </a:xfrm>
           <a:prstGeom prst="rect">
             <a:avLst/>
           </a:prstGeom>
           <a:solidFill>
-            <a:srgbClr val="C49645"/>
+            <a:srgbClr val="EBD4AD"/>
           </a:solidFill>
           <a:ln>
             <a:noFill/>
@@ -4203,14 +4459,14 @@
         </p:nvSpPr>
         <p:spPr>
           <a:xfrm>
-            <a:off x="0" y="274320"/>
-            <a:ext cx="12191695" cy="54864"/>
-          </a:xfrm>
-          <a:prstGeom prst="rect">
+            <a:off x="10180015" y="-1645920"/>
+            <a:ext cx="3474720" cy="3474720"/>
+          </a:xfrm>
+          <a:prstGeom prst="ellipse">
             <a:avLst/>
           </a:prstGeom>
           <a:solidFill>
-            <a:srgbClr val="3B8591"/>
+            <a:srgbClr val="EBD4AD"/>
           </a:solidFill>
           <a:ln>
             <a:noFill/>
@@ -4226,6 +4482,73 @@
       </p:sp>
       <p:sp>
         <p:nvSpPr>
+          <p:cNvPr id="5" name="상단 라벨"/>
+          <p:cNvSpPr txBox="1"/>
+          <p:nvPr/>
+        </p:nvSpPr>
+        <p:spPr>
+          <a:xfrm>
+            <a:off x="640080" y="274320"/>
+            <a:ext cx="5486400" cy="274320"/>
+          </a:xfrm>
+          <a:prstGeom prst="rect">
+            <a:avLst/>
+          </a:prstGeom>
+          <a:noFill/>
+        </p:spPr>
+        <p:txBody>
+          <a:bodyPr wrap="square" lIns="54864" rIns="54864" tIns="27432" bIns="27432" anchor="ctr">
+            <a:noAutofit/>
+          </a:bodyPr>
+          <a:lstStyle/>
+          <a:p>
+            <a:pPr algn="l">
+              <a:lnSpc>
+                <a:spcPct val="115000"/>
+              </a:lnSpc>
+            </a:pPr>
+            <a:r>
+              <a:rPr sz="900" b="1" i="0" spc="250">
+                <a:solidFill>
+                  <a:srgbClr val="26231F"/>
+                </a:solidFill>
+              </a:rPr>
+              <a:t>WEDDING</a:t>
+            </a:r>
+          </a:p>
+        </p:txBody>
+      </p:sp>
+      <p:sp>
+        <p:nvSpPr>
+          <p:cNvPr id="6" name="포인트"/>
+          <p:cNvSpPr/>
+          <p:nvPr/>
+        </p:nvSpPr>
+        <p:spPr>
+          <a:xfrm>
+            <a:off x="11048695" y="502919"/>
+            <a:ext cx="274320" cy="274320"/>
+          </a:xfrm>
+          <a:prstGeom prst="mathPlus">
+            <a:avLst/>
+          </a:prstGeom>
+          <a:solidFill>
+            <a:srgbClr val="FFFFFF"/>
+          </a:solidFill>
+          <a:ln>
+            <a:noFill/>
+          </a:ln>
+        </p:spPr>
+        <p:txBody>
+          <a:bodyPr rtlCol="0" anchor="ctr"/>
+          <a:lstStyle/>
+          <a:p>
+            <a:pPr algn="ctr"/>
+          </a:p>
+        </p:txBody>
+      </p:sp>
+      <p:sp>
+        <p:nvSpPr>
           <p:cNvPr id="2" name="Title 1"/>
           <p:cNvSpPr>
             <a:spLocks noGrp="1"/>
@@ -4236,8 +4559,8 @@
         </p:nvSpPr>
         <p:spPr>
           <a:xfrm>
-            <a:off x="640080" y="457200"/>
-            <a:ext cx="9722815" cy="868680"/>
+            <a:off x="640080" y="658368"/>
+            <a:ext cx="9082735" cy="868680"/>
           </a:xfrm>
         </p:spPr>
         <p:txBody>
@@ -4254,7 +4577,7 @@
             <a:r>
               <a:rPr sz="3000" b="1" i="0">
                 <a:solidFill>
-                  <a:srgbClr val="7C5D27"/>
+                  <a:srgbClr val="26231F"/>
                 </a:solidFill>
               </a:rPr>
               <a:t>답례 안내</a:t>
@@ -4264,26 +4587,26 @@
       </p:sp>
       <p:sp>
         <p:nvSpPr>
-          <p:cNvPr id="5" name="카드 1"/>
+          <p:cNvPr id="7" name="카드 1"/>
           <p:cNvSpPr/>
           <p:nvPr/>
         </p:nvSpPr>
         <p:spPr>
           <a:xfrm>
-            <a:off x="640080" y="1600200"/>
-            <a:ext cx="3484778" cy="4800600"/>
+            <a:off x="640080" y="1783080"/>
+            <a:ext cx="3484778" cy="4389120"/>
           </a:xfrm>
           <a:prstGeom prst="roundRect">
             <a:avLst>
-              <a:gd name="adj" fmla="val 8000"/>
+              <a:gd name="adj" fmla="val 3000"/>
             </a:avLst>
           </a:prstGeom>
           <a:solidFill>
-            <a:srgbClr val="FAF6EF"/>
+            <a:srgbClr val="FFFFFF"/>
           </a:solidFill>
-          <a:ln w="15875">
+          <a:ln w="9525">
             <a:solidFill>
-              <a:srgbClr val="F2E5CF"/>
+              <a:srgbClr val="F6EAD5"/>
             </a:solidFill>
           </a:ln>
         </p:spPr>
@@ -4297,20 +4620,49 @@
       </p:sp>
       <p:sp>
         <p:nvSpPr>
-          <p:cNvPr id="6" name="번호 1"/>
+          <p:cNvPr id="8" name="위쪽 띠"/>
           <p:cNvSpPr/>
           <p:nvPr/>
         </p:nvSpPr>
         <p:spPr>
           <a:xfrm>
-            <a:off x="822959" y="1783080"/>
+            <a:off x="649224" y="1792224"/>
+            <a:ext cx="3466490" cy="82296"/>
+          </a:xfrm>
+          <a:prstGeom prst="rect">
+            <a:avLst/>
+          </a:prstGeom>
+          <a:solidFill>
+            <a:srgbClr val="E1C698"/>
+          </a:solidFill>
+          <a:ln>
+            <a:noFill/>
+          </a:ln>
+        </p:spPr>
+        <p:txBody>
+          <a:bodyPr rtlCol="0" anchor="ctr"/>
+          <a:lstStyle/>
+          <a:p>
+            <a:pPr algn="ctr"/>
+          </a:p>
+        </p:txBody>
+      </p:sp>
+      <p:sp>
+        <p:nvSpPr>
+          <p:cNvPr id="9" name="번호 1"/>
+          <p:cNvSpPr/>
+          <p:nvPr/>
+        </p:nvSpPr>
+        <p:spPr>
+          <a:xfrm>
+            <a:off x="822959" y="1965960"/>
             <a:ext cx="457200" cy="457200"/>
           </a:xfrm>
           <a:prstGeom prst="ellipse">
             <a:avLst/>
           </a:prstGeom>
           <a:solidFill>
-            <a:srgbClr val="C49645"/>
+            <a:srgbClr val="E5EAB8"/>
           </a:solidFill>
           <a:ln>
             <a:noFill/>
@@ -4330,7 +4682,7 @@
             <a:r>
               <a:rPr sz="1600" b="1" i="0">
                 <a:solidFill>
-                  <a:srgbClr val="FFFFFF"/>
+                  <a:srgbClr val="26231F"/>
                 </a:solidFill>
               </a:rPr>
               <a:t>1</a:t>
@@ -4340,13 +4692,13 @@
       </p:sp>
       <p:sp>
         <p:nvSpPr>
-          <p:cNvPr id="7" name="TextBox 6"/>
+          <p:cNvPr id="10" name="TextBox 9"/>
           <p:cNvSpPr txBox="1"/>
           <p:nvPr/>
         </p:nvSpPr>
         <p:spPr>
           <a:xfrm>
-            <a:off x="777240" y="2377440"/>
+            <a:off x="777240" y="2560320"/>
             <a:ext cx="3210458" cy="640080"/>
           </a:xfrm>
           <a:prstGeom prst="rect">
@@ -4368,7 +4720,7 @@
             <a:r>
               <a:rPr sz="1800" b="1" i="0">
                 <a:solidFill>
-                  <a:srgbClr val="7C5D27"/>
+                  <a:srgbClr val="493D27"/>
                 </a:solidFill>
               </a:rPr>
               <a:t>답례품</a:t>
@@ -4378,14 +4730,14 @@
       </p:sp>
       <p:sp>
         <p:nvSpPr>
-          <p:cNvPr id="8" name="TextBox 7"/>
+          <p:cNvPr id="11" name="TextBox 10"/>
           <p:cNvSpPr txBox="1"/>
           <p:nvPr/>
         </p:nvSpPr>
         <p:spPr>
           <a:xfrm>
-            <a:off x="777240" y="3063240"/>
-            <a:ext cx="3210458" cy="3200400"/>
+            <a:off x="777240" y="3246120"/>
+            <a:ext cx="3210458" cy="2788920"/>
           </a:xfrm>
           <a:prstGeom prst="rect">
             <a:avLst/>
@@ -4406,7 +4758,7 @@
             <a:r>
               <a:rPr sz="1500" b="0" i="0">
                 <a:solidFill>
-                  <a:srgbClr val="2B2B2B"/>
+                  <a:srgbClr val="26231F"/>
                 </a:solidFill>
               </a:rPr>
               <a:t>입력하세요</a:t>
@@ -4416,26 +4768,26 @@
       </p:sp>
       <p:sp>
         <p:nvSpPr>
-          <p:cNvPr id="9" name="카드 2"/>
+          <p:cNvPr id="12" name="카드 2"/>
           <p:cNvSpPr/>
           <p:nvPr/>
         </p:nvSpPr>
         <p:spPr>
           <a:xfrm>
-            <a:off x="4353458" y="1600200"/>
-            <a:ext cx="3484778" cy="4800600"/>
+            <a:off x="4353458" y="1783080"/>
+            <a:ext cx="3484778" cy="4389120"/>
           </a:xfrm>
           <a:prstGeom prst="roundRect">
             <a:avLst>
-              <a:gd name="adj" fmla="val 8000"/>
+              <a:gd name="adj" fmla="val 3000"/>
             </a:avLst>
           </a:prstGeom>
           <a:solidFill>
-            <a:srgbClr val="FAF6EF"/>
+            <a:srgbClr val="FFFFFF"/>
           </a:solidFill>
-          <a:ln w="15875">
+          <a:ln w="9525">
             <a:solidFill>
-              <a:srgbClr val="F2E5CF"/>
+              <a:srgbClr val="F6EAD5"/>
             </a:solidFill>
           </a:ln>
         </p:spPr>
@@ -4449,20 +4801,49 @@
       </p:sp>
       <p:sp>
         <p:nvSpPr>
-          <p:cNvPr id="10" name="번호 2"/>
+          <p:cNvPr id="13" name="위쪽 띠"/>
           <p:cNvSpPr/>
           <p:nvPr/>
         </p:nvSpPr>
         <p:spPr>
           <a:xfrm>
-            <a:off x="4536338" y="1783080"/>
+            <a:off x="4362602" y="1792224"/>
+            <a:ext cx="3466490" cy="82296"/>
+          </a:xfrm>
+          <a:prstGeom prst="rect">
+            <a:avLst/>
+          </a:prstGeom>
+          <a:solidFill>
+            <a:srgbClr val="E1C698"/>
+          </a:solidFill>
+          <a:ln>
+            <a:noFill/>
+          </a:ln>
+        </p:spPr>
+        <p:txBody>
+          <a:bodyPr rtlCol="0" anchor="ctr"/>
+          <a:lstStyle/>
+          <a:p>
+            <a:pPr algn="ctr"/>
+          </a:p>
+        </p:txBody>
+      </p:sp>
+      <p:sp>
+        <p:nvSpPr>
+          <p:cNvPr id="14" name="번호 2"/>
+          <p:cNvSpPr/>
+          <p:nvPr/>
+        </p:nvSpPr>
+        <p:spPr>
+          <a:xfrm>
+            <a:off x="4536338" y="1965960"/>
             <a:ext cx="457200" cy="457200"/>
           </a:xfrm>
           <a:prstGeom prst="ellipse">
             <a:avLst/>
           </a:prstGeom>
           <a:solidFill>
-            <a:srgbClr val="C49645"/>
+            <a:srgbClr val="E5EAB8"/>
           </a:solidFill>
           <a:ln>
             <a:noFill/>
@@ -4482,7 +4863,7 @@
             <a:r>
               <a:rPr sz="1600" b="1" i="0">
                 <a:solidFill>
-                  <a:srgbClr val="FFFFFF"/>
+                  <a:srgbClr val="26231F"/>
                 </a:solidFill>
               </a:rPr>
               <a:t>2</a:t>
@@ -4492,13 +4873,13 @@
       </p:sp>
       <p:sp>
         <p:nvSpPr>
-          <p:cNvPr id="11" name="TextBox 10"/>
+          <p:cNvPr id="15" name="TextBox 14"/>
           <p:cNvSpPr txBox="1"/>
           <p:nvPr/>
         </p:nvSpPr>
         <p:spPr>
           <a:xfrm>
-            <a:off x="4490618" y="2377440"/>
+            <a:off x="4490618" y="2560320"/>
             <a:ext cx="3210458" cy="640080"/>
           </a:xfrm>
           <a:prstGeom prst="rect">
@@ -4520,7 +4901,7 @@
             <a:r>
               <a:rPr sz="1800" b="1" i="0">
                 <a:solidFill>
-                  <a:srgbClr val="7C5D27"/>
+                  <a:srgbClr val="493D27"/>
                 </a:solidFill>
               </a:rPr>
               <a:t>방명록</a:t>
@@ -4530,14 +4911,14 @@
       </p:sp>
       <p:sp>
         <p:nvSpPr>
-          <p:cNvPr id="12" name="TextBox 11"/>
+          <p:cNvPr id="16" name="TextBox 15"/>
           <p:cNvSpPr txBox="1"/>
           <p:nvPr/>
         </p:nvSpPr>
         <p:spPr>
           <a:xfrm>
-            <a:off x="4490618" y="3063240"/>
-            <a:ext cx="3210458" cy="3200400"/>
+            <a:off x="4490618" y="3246120"/>
+            <a:ext cx="3210458" cy="2788920"/>
           </a:xfrm>
           <a:prstGeom prst="rect">
             <a:avLst/>
@@ -4558,7 +4939,7 @@
             <a:r>
               <a:rPr sz="1500" b="0" i="0">
                 <a:solidFill>
-                  <a:srgbClr val="2B2B2B"/>
+                  <a:srgbClr val="26231F"/>
                 </a:solidFill>
               </a:rPr>
               <a:t>입력하세요</a:t>
@@ -4568,26 +4949,26 @@
       </p:sp>
       <p:sp>
         <p:nvSpPr>
-          <p:cNvPr id="13" name="카드 3"/>
+          <p:cNvPr id="17" name="카드 3"/>
           <p:cNvSpPr/>
           <p:nvPr/>
         </p:nvSpPr>
         <p:spPr>
           <a:xfrm>
-            <a:off x="8066836" y="1600200"/>
-            <a:ext cx="3484778" cy="4800600"/>
+            <a:off x="8066836" y="1783080"/>
+            <a:ext cx="3484778" cy="4389120"/>
           </a:xfrm>
           <a:prstGeom prst="roundRect">
             <a:avLst>
-              <a:gd name="adj" fmla="val 8000"/>
+              <a:gd name="adj" fmla="val 3000"/>
             </a:avLst>
           </a:prstGeom>
           <a:solidFill>
-            <a:srgbClr val="FAF6EF"/>
+            <a:srgbClr val="FFFFFF"/>
           </a:solidFill>
-          <a:ln w="15875">
+          <a:ln w="9525">
             <a:solidFill>
-              <a:srgbClr val="F2E5CF"/>
+              <a:srgbClr val="F6EAD5"/>
             </a:solidFill>
           </a:ln>
         </p:spPr>
@@ -4601,20 +4982,49 @@
       </p:sp>
       <p:sp>
         <p:nvSpPr>
-          <p:cNvPr id="14" name="번호 3"/>
+          <p:cNvPr id="18" name="위쪽 띠"/>
           <p:cNvSpPr/>
           <p:nvPr/>
         </p:nvSpPr>
         <p:spPr>
           <a:xfrm>
-            <a:off x="8249716" y="1783080"/>
+            <a:off x="8075980" y="1792224"/>
+            <a:ext cx="3466490" cy="82296"/>
+          </a:xfrm>
+          <a:prstGeom prst="rect">
+            <a:avLst/>
+          </a:prstGeom>
+          <a:solidFill>
+            <a:srgbClr val="E1C698"/>
+          </a:solidFill>
+          <a:ln>
+            <a:noFill/>
+          </a:ln>
+        </p:spPr>
+        <p:txBody>
+          <a:bodyPr rtlCol="0" anchor="ctr"/>
+          <a:lstStyle/>
+          <a:p>
+            <a:pPr algn="ctr"/>
+          </a:p>
+        </p:txBody>
+      </p:sp>
+      <p:sp>
+        <p:nvSpPr>
+          <p:cNvPr id="19" name="번호 3"/>
+          <p:cNvSpPr/>
+          <p:nvPr/>
+        </p:nvSpPr>
+        <p:spPr>
+          <a:xfrm>
+            <a:off x="8249716" y="1965960"/>
             <a:ext cx="457200" cy="457200"/>
           </a:xfrm>
           <a:prstGeom prst="ellipse">
             <a:avLst/>
           </a:prstGeom>
           <a:solidFill>
-            <a:srgbClr val="C49645"/>
+            <a:srgbClr val="E5EAB8"/>
           </a:solidFill>
           <a:ln>
             <a:noFill/>
@@ -4634,7 +5044,7 @@
             <a:r>
               <a:rPr sz="1600" b="1" i="0">
                 <a:solidFill>
-                  <a:srgbClr val="FFFFFF"/>
+                  <a:srgbClr val="26231F"/>
                 </a:solidFill>
               </a:rPr>
               <a:t>3</a:t>
@@ -4644,13 +5054,13 @@
       </p:sp>
       <p:sp>
         <p:nvSpPr>
-          <p:cNvPr id="15" name="TextBox 14"/>
+          <p:cNvPr id="20" name="TextBox 19"/>
           <p:cNvSpPr txBox="1"/>
           <p:nvPr/>
         </p:nvSpPr>
         <p:spPr>
           <a:xfrm>
-            <a:off x="8203996" y="2377440"/>
+            <a:off x="8203996" y="2560320"/>
             <a:ext cx="3210458" cy="640080"/>
           </a:xfrm>
           <a:prstGeom prst="rect">
@@ -4672,7 +5082,7 @@
             <a:r>
               <a:rPr sz="1800" b="1" i="0">
                 <a:solidFill>
-                  <a:srgbClr val="7C5D27"/>
+                  <a:srgbClr val="493D27"/>
                 </a:solidFill>
               </a:rPr>
               <a:t>사진 · 영상</a:t>
@@ -4682,14 +5092,14 @@
       </p:sp>
       <p:sp>
         <p:nvSpPr>
-          <p:cNvPr id="16" name="TextBox 15"/>
+          <p:cNvPr id="21" name="TextBox 20"/>
           <p:cNvSpPr txBox="1"/>
           <p:nvPr/>
         </p:nvSpPr>
         <p:spPr>
           <a:xfrm>
-            <a:off x="8203996" y="3063240"/>
-            <a:ext cx="3210458" cy="3200400"/>
+            <a:off x="8203996" y="3246120"/>
+            <a:ext cx="3210458" cy="2788920"/>
           </a:xfrm>
           <a:prstGeom prst="rect">
             <a:avLst/>
@@ -4710,7 +5120,7 @@
             <a:r>
               <a:rPr sz="1500" b="0" i="0">
                 <a:solidFill>
-                  <a:srgbClr val="2B2B2B"/>
+                  <a:srgbClr val="26231F"/>
                 </a:solidFill>
               </a:rPr>
               <a:t>입력하세요</a:t>
@@ -4732,7 +5142,7 @@
     <p:bg>
       <p:bgPr>
         <a:solidFill>
-          <a:srgbClr val="FAF6EF"/>
+          <a:srgbClr val="FFFFFF"/>
         </a:solidFill>
         <a:effectLst/>
       </p:bgPr>
@@ -4752,14 +5162,14 @@
         </p:nvSpPr>
         <p:spPr>
           <a:xfrm>
-            <a:off x="0" y="0"/>
-            <a:ext cx="12191695" cy="274320"/>
+            <a:off x="0" y="6565392"/>
+            <a:ext cx="12191695" cy="292608"/>
           </a:xfrm>
           <a:prstGeom prst="rect">
             <a:avLst/>
           </a:prstGeom>
           <a:solidFill>
-            <a:srgbClr val="C49645"/>
+            <a:srgbClr val="EBD4AD"/>
           </a:solidFill>
           <a:ln>
             <a:noFill/>
@@ -4781,14 +5191,14 @@
         </p:nvSpPr>
         <p:spPr>
           <a:xfrm>
-            <a:off x="0" y="274320"/>
-            <a:ext cx="12191695" cy="54864"/>
-          </a:xfrm>
-          <a:prstGeom prst="rect">
+            <a:off x="10180015" y="-1645920"/>
+            <a:ext cx="3474720" cy="3474720"/>
+          </a:xfrm>
+          <a:prstGeom prst="ellipse">
             <a:avLst/>
           </a:prstGeom>
           <a:solidFill>
-            <a:srgbClr val="3B8591"/>
+            <a:srgbClr val="EBD4AD"/>
           </a:solidFill>
           <a:ln>
             <a:noFill/>
@@ -4804,6 +5214,73 @@
       </p:sp>
       <p:sp>
         <p:nvSpPr>
+          <p:cNvPr id="5" name="상단 라벨"/>
+          <p:cNvSpPr txBox="1"/>
+          <p:nvPr/>
+        </p:nvSpPr>
+        <p:spPr>
+          <a:xfrm>
+            <a:off x="640080" y="274320"/>
+            <a:ext cx="5486400" cy="274320"/>
+          </a:xfrm>
+          <a:prstGeom prst="rect">
+            <a:avLst/>
+          </a:prstGeom>
+          <a:noFill/>
+        </p:spPr>
+        <p:txBody>
+          <a:bodyPr wrap="square" lIns="54864" rIns="54864" tIns="27432" bIns="27432" anchor="ctr">
+            <a:noAutofit/>
+          </a:bodyPr>
+          <a:lstStyle/>
+          <a:p>
+            <a:pPr algn="l">
+              <a:lnSpc>
+                <a:spcPct val="115000"/>
+              </a:lnSpc>
+            </a:pPr>
+            <a:r>
+              <a:rPr sz="900" b="1" i="0" spc="250">
+                <a:solidFill>
+                  <a:srgbClr val="26231F"/>
+                </a:solidFill>
+              </a:rPr>
+              <a:t>WEDDING</a:t>
+            </a:r>
+          </a:p>
+        </p:txBody>
+      </p:sp>
+      <p:sp>
+        <p:nvSpPr>
+          <p:cNvPr id="6" name="포인트"/>
+          <p:cNvSpPr/>
+          <p:nvPr/>
+        </p:nvSpPr>
+        <p:spPr>
+          <a:xfrm>
+            <a:off x="11048695" y="502919"/>
+            <a:ext cx="274320" cy="274320"/>
+          </a:xfrm>
+          <a:prstGeom prst="mathPlus">
+            <a:avLst/>
+          </a:prstGeom>
+          <a:solidFill>
+            <a:srgbClr val="FFFFFF"/>
+          </a:solidFill>
+          <a:ln>
+            <a:noFill/>
+          </a:ln>
+        </p:spPr>
+        <p:txBody>
+          <a:bodyPr rtlCol="0" anchor="ctr"/>
+          <a:lstStyle/>
+          <a:p>
+            <a:pPr algn="ctr"/>
+          </a:p>
+        </p:txBody>
+      </p:sp>
+      <p:sp>
+        <p:nvSpPr>
           <p:cNvPr id="2" name="Title 1"/>
           <p:cNvSpPr>
             <a:spLocks noGrp="1"/>
@@ -4814,8 +5291,8 @@
         </p:nvSpPr>
         <p:spPr>
           <a:xfrm>
-            <a:off x="640080" y="457200"/>
-            <a:ext cx="9722815" cy="868680"/>
+            <a:off x="640080" y="658368"/>
+            <a:ext cx="9082735" cy="868680"/>
           </a:xfrm>
         </p:spPr>
         <p:txBody>
@@ -4832,7 +5309,7 @@
             <a:r>
               <a:rPr sz="3000" b="1" i="0">
                 <a:solidFill>
-                  <a:srgbClr val="7C5D27"/>
+                  <a:srgbClr val="26231F"/>
                 </a:solidFill>
               </a:rPr>
               <a:t>웨딩 사진</a:t>
@@ -4842,14 +5319,14 @@
       </p:sp>
       <p:sp>
         <p:nvSpPr>
-          <p:cNvPr id="5" name="사진 자리"/>
+          <p:cNvPr id="7" name="사진 자리"/>
           <p:cNvSpPr/>
           <p:nvPr/>
         </p:nvSpPr>
         <p:spPr>
           <a:xfrm>
-            <a:off x="640080" y="1600200"/>
-            <a:ext cx="3515258" cy="2308860"/>
+            <a:off x="640080" y="1783080"/>
+            <a:ext cx="3515258" cy="2103120"/>
           </a:xfrm>
           <a:prstGeom prst="roundRect">
             <a:avLst>
@@ -4857,12 +5334,10 @@
             </a:avLst>
           </a:prstGeom>
           <a:solidFill>
-            <a:srgbClr val="F2E5CF"/>
+            <a:srgbClr val="F6EAD5"/>
           </a:solidFill>
           <a:ln w="19050">
-            <a:solidFill>
-              <a:srgbClr val="C49645"/>
-            </a:solidFill>
+            <a:noFill/>
             <a:prstDash val="dash"/>
           </a:ln>
         </p:spPr>
@@ -4880,7 +5355,7 @@
             <a:r>
               <a:rPr sz="1200" b="0" i="0">
                 <a:solidFill>
-                  <a:srgbClr val="7C5D27"/>
+                  <a:srgbClr val="8E8780"/>
                 </a:solidFill>
               </a:rPr>
               <a:t>사진 1</a:t>
@@ -4890,14 +5365,14 @@
       </p:sp>
       <p:sp>
         <p:nvSpPr>
-          <p:cNvPr id="6" name="사진 자리"/>
+          <p:cNvPr id="8" name="사진 자리"/>
           <p:cNvSpPr/>
           <p:nvPr/>
         </p:nvSpPr>
         <p:spPr>
           <a:xfrm>
-            <a:off x="4338218" y="1600200"/>
-            <a:ext cx="3515258" cy="2308860"/>
+            <a:off x="4338218" y="1783080"/>
+            <a:ext cx="3515258" cy="2103120"/>
           </a:xfrm>
           <a:prstGeom prst="roundRect">
             <a:avLst>
@@ -4905,12 +5380,10 @@
             </a:avLst>
           </a:prstGeom>
           <a:solidFill>
-            <a:srgbClr val="F2E5CF"/>
+            <a:srgbClr val="F6EAD5"/>
           </a:solidFill>
           <a:ln w="19050">
-            <a:solidFill>
-              <a:srgbClr val="C49645"/>
-            </a:solidFill>
+            <a:noFill/>
             <a:prstDash val="dash"/>
           </a:ln>
         </p:spPr>
@@ -4928,7 +5401,7 @@
             <a:r>
               <a:rPr sz="1200" b="0" i="0">
                 <a:solidFill>
-                  <a:srgbClr val="7C5D27"/>
+                  <a:srgbClr val="8E8780"/>
                 </a:solidFill>
               </a:rPr>
               <a:t>사진 2</a:t>
@@ -4938,14 +5411,14 @@
       </p:sp>
       <p:sp>
         <p:nvSpPr>
-          <p:cNvPr id="7" name="사진 자리"/>
+          <p:cNvPr id="9" name="사진 자리"/>
           <p:cNvSpPr/>
           <p:nvPr/>
         </p:nvSpPr>
         <p:spPr>
           <a:xfrm>
-            <a:off x="8036356" y="1600200"/>
-            <a:ext cx="3515258" cy="2308860"/>
+            <a:off x="8036356" y="1783080"/>
+            <a:ext cx="3515258" cy="2103120"/>
           </a:xfrm>
           <a:prstGeom prst="roundRect">
             <a:avLst>
@@ -4953,12 +5426,10 @@
             </a:avLst>
           </a:prstGeom>
           <a:solidFill>
-            <a:srgbClr val="F2E5CF"/>
+            <a:srgbClr val="F6EAD5"/>
           </a:solidFill>
           <a:ln w="19050">
-            <a:solidFill>
-              <a:srgbClr val="C49645"/>
-            </a:solidFill>
+            <a:noFill/>
             <a:prstDash val="dash"/>
           </a:ln>
         </p:spPr>
@@ -4976,7 +5447,7 @@
             <a:r>
               <a:rPr sz="1200" b="0" i="0">
                 <a:solidFill>
-                  <a:srgbClr val="7C5D27"/>
+                  <a:srgbClr val="8E8780"/>
                 </a:solidFill>
               </a:rPr>
               <a:t>사진 3</a:t>
@@ -4986,14 +5457,14 @@
       </p:sp>
       <p:sp>
         <p:nvSpPr>
-          <p:cNvPr id="8" name="사진 자리"/>
+          <p:cNvPr id="10" name="사진 자리"/>
           <p:cNvSpPr/>
           <p:nvPr/>
         </p:nvSpPr>
         <p:spPr>
           <a:xfrm>
-            <a:off x="640080" y="4091939"/>
-            <a:ext cx="3515258" cy="2308860"/>
+            <a:off x="640080" y="4069080"/>
+            <a:ext cx="3515258" cy="2103120"/>
           </a:xfrm>
           <a:prstGeom prst="roundRect">
             <a:avLst>
@@ -5001,12 +5472,10 @@
             </a:avLst>
           </a:prstGeom>
           <a:solidFill>
-            <a:srgbClr val="F2E5CF"/>
+            <a:srgbClr val="F6EAD5"/>
           </a:solidFill>
           <a:ln w="19050">
-            <a:solidFill>
-              <a:srgbClr val="C49645"/>
-            </a:solidFill>
+            <a:noFill/>
             <a:prstDash val="dash"/>
           </a:ln>
         </p:spPr>
@@ -5024,7 +5493,7 @@
             <a:r>
               <a:rPr sz="1200" b="0" i="0">
                 <a:solidFill>
-                  <a:srgbClr val="7C5D27"/>
+                  <a:srgbClr val="8E8780"/>
                 </a:solidFill>
               </a:rPr>
               <a:t>사진 4</a:t>
@@ -5034,14 +5503,14 @@
       </p:sp>
       <p:sp>
         <p:nvSpPr>
-          <p:cNvPr id="9" name="사진 자리"/>
+          <p:cNvPr id="11" name="사진 자리"/>
           <p:cNvSpPr/>
           <p:nvPr/>
         </p:nvSpPr>
         <p:spPr>
           <a:xfrm>
-            <a:off x="4338218" y="4091939"/>
-            <a:ext cx="3515258" cy="2308860"/>
+            <a:off x="4338218" y="4069080"/>
+            <a:ext cx="3515258" cy="2103120"/>
           </a:xfrm>
           <a:prstGeom prst="roundRect">
             <a:avLst>
@@ -5049,12 +5518,10 @@
             </a:avLst>
           </a:prstGeom>
           <a:solidFill>
-            <a:srgbClr val="F2E5CF"/>
+            <a:srgbClr val="F6EAD5"/>
           </a:solidFill>
           <a:ln w="19050">
-            <a:solidFill>
-              <a:srgbClr val="C49645"/>
-            </a:solidFill>
+            <a:noFill/>
             <a:prstDash val="dash"/>
           </a:ln>
         </p:spPr>
@@ -5072,7 +5539,7 @@
             <a:r>
               <a:rPr sz="1200" b="0" i="0">
                 <a:solidFill>
-                  <a:srgbClr val="7C5D27"/>
+                  <a:srgbClr val="8E8780"/>
                 </a:solidFill>
               </a:rPr>
               <a:t>사진 5</a:t>
@@ -5082,14 +5549,14 @@
       </p:sp>
       <p:sp>
         <p:nvSpPr>
-          <p:cNvPr id="10" name="사진 자리"/>
+          <p:cNvPr id="12" name="사진 자리"/>
           <p:cNvSpPr/>
           <p:nvPr/>
         </p:nvSpPr>
         <p:spPr>
           <a:xfrm>
-            <a:off x="8036356" y="4091939"/>
-            <a:ext cx="3515258" cy="2308860"/>
+            <a:off x="8036356" y="4069080"/>
+            <a:ext cx="3515258" cy="2103120"/>
           </a:xfrm>
           <a:prstGeom prst="roundRect">
             <a:avLst>
@@ -5097,12 +5564,10 @@
             </a:avLst>
           </a:prstGeom>
           <a:solidFill>
-            <a:srgbClr val="F2E5CF"/>
+            <a:srgbClr val="F6EAD5"/>
           </a:solidFill>
           <a:ln w="19050">
-            <a:solidFill>
-              <a:srgbClr val="C49645"/>
-            </a:solidFill>
+            <a:noFill/>
             <a:prstDash val="dash"/>
           </a:ln>
         </p:spPr>
@@ -5120,7 +5585,7 @@
             <a:r>
               <a:rPr sz="1200" b="0" i="0">
                 <a:solidFill>
-                  <a:srgbClr val="7C5D27"/>
+                  <a:srgbClr val="8E8780"/>
                 </a:solidFill>
               </a:rPr>
               <a:t>사진 6</a:t>
@@ -5139,6 +5604,14 @@
 <file path=ppt/slides/slide6.xml><?xml version="1.0" encoding="utf-8"?>
 <p:sld xmlns:a="http://schemas.openxmlformats.org/drawingml/2006/main" xmlns:p="http://schemas.openxmlformats.org/presentationml/2006/main" xmlns:r="http://schemas.openxmlformats.org/officeDocument/2006/relationships">
   <p:cSld>
+    <p:bg>
+      <p:bgPr>
+        <a:solidFill>
+          <a:srgbClr val="F6EAD5"/>
+        </a:solidFill>
+        <a:effectLst/>
+      </p:bgPr>
+    </p:bg>
     <p:spTree>
       <p:nvGrpSpPr>
         <p:cNvPr id="1" name=""/>
@@ -5146,30 +5619,119 @@
         <p:nvPr/>
       </p:nvGrpSpPr>
       <p:grpSpPr/>
-      <p:pic>
-        <p:nvPicPr>
-          <p:cNvPr id="3" name="표지 그림" descr="wedding-45.jpg"/>
-          <p:cNvPicPr>
-            <a:picLocks noChangeAspect="1"/>
-          </p:cNvPicPr>
+      <p:sp>
+        <p:nvSpPr>
+          <p:cNvPr id="3" name="사진 자리"/>
+          <p:cNvSpPr/>
           <p:nvPr/>
-        </p:nvPicPr>
-        <p:blipFill>
-          <a:blip r:embed="rId2"/>
-          <a:stretch>
-            <a:fillRect/>
-          </a:stretch>
-        </p:blipFill>
-        <p:spPr>
-          <a:xfrm>
-            <a:off x="0" y="0"/>
-            <a:ext cx="12191695" cy="6858000"/>
+        </p:nvSpPr>
+        <p:spPr>
+          <a:xfrm>
+            <a:off x="7558851" y="685800"/>
+            <a:ext cx="3169840" cy="5486400"/>
+          </a:xfrm>
+          <a:prstGeom prst="round2SameRect">
+            <a:avLst>
+              <a:gd name="adj1" fmla="val 50000"/>
+              <a:gd name="adj2" fmla="val 0"/>
+            </a:avLst>
+          </a:prstGeom>
+          <a:solidFill>
+            <a:srgbClr val="EBD4AD"/>
+          </a:solidFill>
+          <a:ln>
+            <a:noFill/>
+          </a:ln>
+        </p:spPr>
+        <p:txBody>
+          <a:bodyPr rtlCol="0" anchor="ctr" wrap="square" lIns="54864" rIns="54864" tIns="27432" bIns="27432">
+            <a:noAutofit/>
+          </a:bodyPr>
+          <a:lstStyle/>
+          <a:p>
+            <a:pPr algn="ctr">
+              <a:lnSpc>
+                <a:spcPct val="100000"/>
+              </a:lnSpc>
+            </a:pPr>
+            <a:r>
+              <a:rPr sz="1400" b="0" i="0">
+                <a:solidFill>
+                  <a:srgbClr val="493D27"/>
+                </a:solidFill>
+              </a:rPr>
+              <a:t>사진을 넣어 주세요</a:t>
+            </a:r>
+          </a:p>
+        </p:txBody>
+      </p:sp>
+      <p:sp>
+        <p:nvSpPr>
+          <p:cNvPr id="4" name="장식"/>
+          <p:cNvSpPr/>
+          <p:nvPr/>
+        </p:nvSpPr>
+        <p:spPr>
+          <a:xfrm>
+            <a:off x="6827349" y="4251960"/>
+            <a:ext cx="1005840" cy="1005840"/>
+          </a:xfrm>
+          <a:prstGeom prst="ellipse">
+            <a:avLst/>
+          </a:prstGeom>
+          <a:solidFill>
+            <a:srgbClr val="EBD4AD"/>
+          </a:solidFill>
+          <a:ln>
+            <a:noFill/>
+          </a:ln>
+        </p:spPr>
+        <p:txBody>
+          <a:bodyPr rtlCol="0" anchor="ctr"/>
+          <a:lstStyle/>
+          <a:p>
+            <a:pPr algn="ctr"/>
+          </a:p>
+        </p:txBody>
+      </p:sp>
+      <p:sp>
+        <p:nvSpPr>
+          <p:cNvPr id="5" name="라벨"/>
+          <p:cNvSpPr txBox="1"/>
+          <p:nvPr/>
+        </p:nvSpPr>
+        <p:spPr>
+          <a:xfrm>
+            <a:off x="822960" y="2148840"/>
+            <a:ext cx="5608179" cy="274320"/>
           </a:xfrm>
           <a:prstGeom prst="rect">
             <a:avLst/>
           </a:prstGeom>
-        </p:spPr>
-      </p:pic>
+          <a:noFill/>
+        </p:spPr>
+        <p:txBody>
+          <a:bodyPr wrap="square" lIns="54864" rIns="54864" tIns="27432" bIns="27432" anchor="t">
+            <a:noAutofit/>
+          </a:bodyPr>
+          <a:lstStyle/>
+          <a:p>
+            <a:pPr algn="l">
+              <a:lnSpc>
+                <a:spcPct val="115000"/>
+              </a:lnSpc>
+            </a:pPr>
+            <a:r>
+              <a:rPr sz="1000" b="1" i="0" spc="250">
+                <a:solidFill>
+                  <a:srgbClr val="26231F"/>
+                </a:solidFill>
+              </a:rPr>
+              <a:t>WEDDING</a:t>
+            </a:r>
+          </a:p>
+        </p:txBody>
+      </p:sp>
       <p:sp>
         <p:nvSpPr>
           <p:cNvPr id="2" name="Title 1"/>
@@ -5182,8 +5744,8 @@
         </p:nvSpPr>
         <p:spPr>
           <a:xfrm>
-            <a:off x="853418" y="2057400"/>
-            <a:ext cx="6095847" cy="1554480"/>
+            <a:off x="822960" y="2606040"/>
+            <a:ext cx="5608179" cy="1188720"/>
           </a:xfrm>
         </p:spPr>
         <p:txBody>
@@ -5200,7 +5762,7 @@
             <a:r>
               <a:rPr sz="3400" b="1" i="0">
                 <a:solidFill>
-                  <a:srgbClr val="7C5D27"/>
+                  <a:srgbClr val="26231F"/>
                 </a:solidFill>
               </a:rPr>
               <a:t>와 주셔서 고맙습니다</a:t>
@@ -5210,14 +5772,14 @@
       </p:sp>
       <p:sp>
         <p:nvSpPr>
-          <p:cNvPr id="4" name="한 줄 문구"/>
+          <p:cNvPr id="6" name="한 줄 문구"/>
           <p:cNvSpPr txBox="1"/>
           <p:nvPr/>
         </p:nvSpPr>
         <p:spPr>
           <a:xfrm>
-            <a:off x="853418" y="3749039"/>
-            <a:ext cx="6095847" cy="822960"/>
+            <a:off x="822960" y="3886200"/>
+            <a:ext cx="5608179" cy="822960"/>
           </a:xfrm>
           <a:prstGeom prst="rect">
             <a:avLst/>
@@ -5236,9 +5798,9 @@
               </a:lnSpc>
             </a:pPr>
             <a:r>
-              <a:rPr sz="1700" b="0" i="1">
-                <a:solidFill>
-                  <a:srgbClr val="7C5D27"/>
+              <a:rPr sz="1700" b="0" i="0">
+                <a:solidFill>
+                  <a:srgbClr val="26231F"/>
                 </a:solidFill>
               </a:rPr>
               <a:t>잘 살겠습니다</a:t>
@@ -5248,14 +5810,14 @@
       </p:sp>
       <p:sp>
         <p:nvSpPr>
-          <p:cNvPr id="5" name="안내 문구"/>
+          <p:cNvPr id="7" name="안내 문구"/>
           <p:cNvSpPr txBox="1"/>
           <p:nvPr/>
         </p:nvSpPr>
         <p:spPr>
           <a:xfrm>
-            <a:off x="853418" y="4617720"/>
-            <a:ext cx="6095847" cy="914400"/>
+            <a:off x="822960" y="4754880"/>
+            <a:ext cx="5608179" cy="914400"/>
           </a:xfrm>
           <a:prstGeom prst="rect">
             <a:avLst/>
@@ -5276,7 +5838,7 @@
             <a:r>
               <a:rPr sz="1400" b="0" i="0">
                 <a:solidFill>
-                  <a:srgbClr val="666666"/>
+                  <a:srgbClr val="26231F"/>
                 </a:solidFill>
               </a:rPr>
               <a:t>신랑 이름 ♥ 신부 이름</a:t>
@@ -5303,34 +5865,34 @@
         <a:sysClr val="window" lastClr="FFFFFF"/>
       </a:lt1>
       <a:dk2>
-        <a:srgbClr val="7C5D27"/>
+        <a:srgbClr val="493D27"/>
       </a:dk2>
       <a:lt2>
-        <a:srgbClr val="FAF6EF"/>
+        <a:srgbClr val="FBF6EC"/>
       </a:lt2>
       <a:accent1>
-        <a:srgbClr val="C49645"/>
+        <a:srgbClr val="E1C698"/>
       </a:accent1>
       <a:accent2>
-        <a:srgbClr val="3B8591"/>
+        <a:srgbClr val="E5EAB8"/>
       </a:accent2>
       <a:accent3>
-        <a:srgbClr val="7C5D27"/>
+        <a:srgbClr val="493D27"/>
       </a:accent3>
       <a:accent4>
-        <a:srgbClr val="F2E5CF"/>
+        <a:srgbClr val="F6EAD5"/>
       </a:accent4>
       <a:accent5>
-        <a:srgbClr val="808E6B"/>
+        <a:srgbClr val="E3D8A8"/>
       </a:accent5>
       <a:accent6>
-        <a:srgbClr val="B09E7D"/>
+        <a:srgbClr val="928B7D"/>
       </a:accent6>
       <a:hlink>
-        <a:srgbClr val="C49645"/>
+        <a:srgbClr val="E1C698"/>
       </a:hlink>
       <a:folHlink>
-        <a:srgbClr val="7C5D27"/>
+        <a:srgbClr val="493D27"/>
       </a:folHlink>
     </a:clrScheme>
     <a:fontScheme name="Office">
